--- a/slides/presentation.pptx
+++ b/slides/presentation.pptx
@@ -4269,7 +4269,7 @@
               <a:defRPr sz="1800"/>
             </a:pPr>
             <a:r>
-              <a:t>José Alberto Martínez Navarro  ·  Deep Learning, UPE  ·  Final project, October 2026</a:t>
+              <a:t>José Alberto Martínez Navarro  ·  Aprendizaje Profundo  ·  Final project, October 2026</a:t>
             </a:r>
           </a:p>
         </p:txBody>
